--- a/fixtures/sample-apostrophe.pptx
+++ b/fixtures/sample-apostrophe.pptx
@@ -134,7 +134,9 @@
           <a:lstStyle/>
           <a:p>
             <a:r>
-              <a:rPr sz="3465"/>
+              <a:rPr sz="3465">
+                <a:latin typeface="等线"/>
+              </a:rPr>
               <a:t>数一数，画一画。 I’m ready.</a:t>
             </a:r>
           </a:p>
